--- a/The Skool - Jens Dossel.pptx
+++ b/The Skool - Jens Dossel.pptx
@@ -8,6 +8,7 @@
     <p:sldId id="256" r:id="rId2"/>
     <p:sldId id="257" r:id="rId3"/>
     <p:sldId id="258" r:id="rId4"/>
+    <p:sldId id="259" r:id="rId5"/>
   </p:sldIdLst>
   <p:sldSz cx="12192000" cy="6858000"/>
   <p:notesSz cx="6858000" cy="9144000"/>
@@ -106,6 +107,11 @@
       </a:defRPr>
     </a:lvl9pPr>
   </p:defaultTextStyle>
+  <p:extLst>
+    <p:ext uri="{EFAFB233-063F-42B5-8137-9DF3F51BA10A}">
+      <p15:sldGuideLst xmlns:p15="http://schemas.microsoft.com/office/powerpoint/2012/main"/>
+    </p:ext>
+  </p:extLst>
 </p:presentation>
 </file>
 
@@ -3905,7 +3911,15 @@
             </a:r>
             <a:r>
               <a:rPr lang="en-SE" sz="3600" dirty="0"/>
-              <a:t>Antal ansökningar per utbildningsområde, sorterat på flest ansökningar – uppgift_1/1</a:t>
+              <a:t>Antal ansökningar per utbildningsområde, sorterat på flest ansökningar – uppgift_1</a:t>
+            </a:r>
+            <a:r>
+              <a:rPr lang="en-SE" sz="3600"/>
+              <a:t>/a_1.</a:t>
+            </a:r>
+            <a:r>
+              <a:rPr lang="en-SE" sz="3600" dirty="0"/>
+              <a:t>sql</a:t>
             </a:r>
             <a:endParaRPr lang="sv-SE" dirty="0"/>
           </a:p>
@@ -4042,6 +4056,205 @@
     <p:extLst>
       <p:ext uri="{BB962C8B-B14F-4D97-AF65-F5344CB8AC3E}">
         <p14:creationId xmlns:p14="http://schemas.microsoft.com/office/powerpoint/2010/main" val="1807334586"/>
+      </p:ext>
+    </p:extLst>
+  </p:cSld>
+  <p:clrMapOvr>
+    <a:masterClrMapping/>
+  </p:clrMapOvr>
+</p:sld>
+</file>
+
+<file path=ppt/slides/slide4.xml><?xml version="1.0" encoding="utf-8"?>
+<p:sld xmlns:a="http://schemas.openxmlformats.org/drawingml/2006/main" xmlns:r="http://schemas.openxmlformats.org/officeDocument/2006/relationships" xmlns:p="http://schemas.openxmlformats.org/presentationml/2006/main">
+  <p:cSld>
+    <p:spTree>
+      <p:nvGrpSpPr>
+        <p:cNvPr id="1" name="">
+          <a:extLst>
+            <a:ext uri="{FF2B5EF4-FFF2-40B4-BE49-F238E27FC236}">
+              <a16:creationId xmlns:a16="http://schemas.microsoft.com/office/drawing/2014/main" id="{D93ED477-5BCD-2DC5-4D7D-AAE0738AA921}"/>
+            </a:ext>
+          </a:extLst>
+        </p:cNvPr>
+        <p:cNvGrpSpPr/>
+        <p:nvPr/>
+      </p:nvGrpSpPr>
+      <p:grpSpPr>
+        <a:xfrm>
+          <a:off x="0" y="0"/>
+          <a:ext cx="0" cy="0"/>
+          <a:chOff x="0" y="0"/>
+          <a:chExt cx="0" cy="0"/>
+        </a:xfrm>
+      </p:grpSpPr>
+      <p:sp>
+        <p:nvSpPr>
+          <p:cNvPr id="2" name="Title 1">
+            <a:extLst>
+              <a:ext uri="{FF2B5EF4-FFF2-40B4-BE49-F238E27FC236}">
+                <a16:creationId xmlns:a16="http://schemas.microsoft.com/office/drawing/2014/main" id="{A9CAFBE9-034D-4178-F643-FFA3490560DB}"/>
+              </a:ext>
+            </a:extLst>
+          </p:cNvPr>
+          <p:cNvSpPr>
+            <a:spLocks noGrp="1"/>
+          </p:cNvSpPr>
+          <p:nvPr>
+            <p:ph type="title"/>
+          </p:nvPr>
+        </p:nvSpPr>
+        <p:spPr>
+          <a:xfrm>
+            <a:off x="838200" y="365125"/>
+            <a:ext cx="10515600" cy="1920875"/>
+          </a:xfrm>
+        </p:spPr>
+        <p:txBody>
+          <a:bodyPr>
+            <a:normAutofit/>
+          </a:bodyPr>
+          <a:lstStyle/>
+          <a:p>
+            <a:r>
+              <a:rPr lang="sv-SE" dirty="0"/>
+              <a:t>Uppgift 1 – grundläggande EDA</a:t>
+            </a:r>
+            <a:br>
+              <a:rPr lang="sv-SE" dirty="0"/>
+            </a:br>
+            <a:r>
+              <a:rPr lang="sv-SE" sz="3200" dirty="0"/>
+              <a:t>b) </a:t>
+            </a:r>
+            <a:r>
+              <a:rPr lang="en-SE" sz="3200" dirty="0"/>
+              <a:t>Antal BEVILJADE ansökningar per utbildningsområde– uppgift_1/b_1.sql</a:t>
+            </a:r>
+            <a:endParaRPr lang="sv-SE" sz="3200" dirty="0"/>
+          </a:p>
+        </p:txBody>
+      </p:sp>
+      <p:sp>
+        <p:nvSpPr>
+          <p:cNvPr id="3" name="Content Placeholder 2">
+            <a:extLst>
+              <a:ext uri="{FF2B5EF4-FFF2-40B4-BE49-F238E27FC236}">
+                <a16:creationId xmlns:a16="http://schemas.microsoft.com/office/drawing/2014/main" id="{AE32EE3D-0990-C53E-8D09-EAABD306F712}"/>
+              </a:ext>
+            </a:extLst>
+          </p:cNvPr>
+          <p:cNvSpPr>
+            <a:spLocks noGrp="1"/>
+          </p:cNvSpPr>
+          <p:nvPr>
+            <p:ph idx="1"/>
+          </p:nvPr>
+        </p:nvSpPr>
+        <p:spPr>
+          <a:xfrm>
+            <a:off x="838200" y="2530549"/>
+            <a:ext cx="6860059" cy="3646414"/>
+          </a:xfrm>
+        </p:spPr>
+        <p:txBody>
+          <a:bodyPr/>
+          <a:lstStyle/>
+          <a:p>
+            <a:pPr marL="0" indent="0">
+              <a:buNone/>
+            </a:pPr>
+            <a:r>
+              <a:rPr lang="sv-SE" dirty="0"/>
+              <a:t>För att endast se de beviljade ansökningarna lade jag till villkoret att Beslut ska vara lika med ”Beviljad”.</a:t>
+            </a:r>
+            <a:br>
+              <a:rPr lang="sv-SE" dirty="0"/>
+            </a:br>
+            <a:br>
+              <a:rPr lang="sv-SE" dirty="0"/>
+            </a:br>
+            <a:r>
+              <a:rPr lang="en-SE" dirty="0">
+                <a:solidFill>
+                  <a:schemeClr val="accent6"/>
+                </a:solidFill>
+              </a:rPr>
+              <a:t>where Beslut = 'Beviljad'</a:t>
+            </a:r>
+          </a:p>
+          <a:p>
+            <a:pPr marL="0" indent="0">
+              <a:buNone/>
+            </a:pPr>
+            <a:endParaRPr lang="sv-SE" dirty="0"/>
+          </a:p>
+        </p:txBody>
+      </p:sp>
+      <p:pic>
+        <p:nvPicPr>
+          <p:cNvPr id="8" name="Picture 7">
+            <a:extLst>
+              <a:ext uri="{FF2B5EF4-FFF2-40B4-BE49-F238E27FC236}">
+                <a16:creationId xmlns:a16="http://schemas.microsoft.com/office/drawing/2014/main" id="{8C67C239-9839-FF77-E65C-232E7FADA020}"/>
+              </a:ext>
+            </a:extLst>
+          </p:cNvPr>
+          <p:cNvPicPr>
+            <a:picLocks noChangeAspect="1"/>
+          </p:cNvPicPr>
+          <p:nvPr/>
+        </p:nvPicPr>
+        <p:blipFill>
+          <a:blip r:embed="rId2"/>
+          <a:stretch>
+            <a:fillRect/>
+          </a:stretch>
+        </p:blipFill>
+        <p:spPr>
+          <a:xfrm>
+            <a:off x="7337854" y="1539556"/>
+            <a:ext cx="4531766" cy="2618766"/>
+          </a:xfrm>
+          <a:prstGeom prst="rect">
+            <a:avLst/>
+          </a:prstGeom>
+        </p:spPr>
+      </p:pic>
+      <p:pic>
+        <p:nvPicPr>
+          <p:cNvPr id="9" name="Picture 8">
+            <a:extLst>
+              <a:ext uri="{FF2B5EF4-FFF2-40B4-BE49-F238E27FC236}">
+                <a16:creationId xmlns:a16="http://schemas.microsoft.com/office/drawing/2014/main" id="{43AD6A94-99FB-0648-F92A-1BB3906090C4}"/>
+              </a:ext>
+            </a:extLst>
+          </p:cNvPr>
+          <p:cNvPicPr>
+            <a:picLocks noChangeAspect="1"/>
+          </p:cNvPicPr>
+          <p:nvPr/>
+        </p:nvPicPr>
+        <p:blipFill>
+          <a:blip r:embed="rId3"/>
+          <a:stretch>
+            <a:fillRect/>
+          </a:stretch>
+        </p:blipFill>
+        <p:spPr>
+          <a:xfrm>
+            <a:off x="7337854" y="3592200"/>
+            <a:ext cx="4531766" cy="3353631"/>
+          </a:xfrm>
+          <a:prstGeom prst="rect">
+            <a:avLst/>
+          </a:prstGeom>
+        </p:spPr>
+      </p:pic>
+    </p:spTree>
+    <p:extLst>
+      <p:ext uri="{BB962C8B-B14F-4D97-AF65-F5344CB8AC3E}">
+        <p14:creationId xmlns:p14="http://schemas.microsoft.com/office/powerpoint/2010/main" val="2183803795"/>
       </p:ext>
     </p:extLst>
   </p:cSld>
